--- a/formation/Didikids_Parc_Formation_Employes.pptx
+++ b/formation/Didikids_Parc_Formation_Employes.pptx
@@ -7408,8 +7408,8 @@
         </p:nvSpPr>
         <p:spPr>
           <a:xfrm>
-            <a:off x="960120" y="3191256"/>
-            <a:ext cx="219456" cy="219456"/>
+            <a:off x="960120" y="3072384"/>
+            <a:ext cx="201168" cy="201168"/>
           </a:xfrm>
           <a:prstGeom prst="ellipse">
             <a:avLst/>
@@ -7461,8 +7461,8 @@
         </p:nvSpPr>
         <p:spPr>
           <a:xfrm>
-            <a:off x="1325880" y="3136392"/>
-            <a:ext cx="2606040" cy="548640"/>
+            <a:off x="1307592" y="2999232"/>
+            <a:ext cx="2624328" cy="566928"/>
           </a:xfrm>
           <a:prstGeom prst="rect">
             <a:avLst/>
@@ -7484,7 +7484,7 @@
               </a:spcAft>
             </a:pPr>
             <a:r>
-              <a:rPr sz="1400" b="0">
+              <a:rPr sz="1350" b="0">
                 <a:solidFill>
                   <a:srgbClr val="2D3A2E"/>
                 </a:solidFill>
@@ -7503,8 +7503,8 @@
         </p:nvSpPr>
         <p:spPr>
           <a:xfrm>
-            <a:off x="960120" y="3776472"/>
-            <a:ext cx="219456" cy="219456"/>
+            <a:off x="960120" y="3584448"/>
+            <a:ext cx="201168" cy="201168"/>
           </a:xfrm>
           <a:prstGeom prst="ellipse">
             <a:avLst/>
@@ -7556,8 +7556,8 @@
         </p:nvSpPr>
         <p:spPr>
           <a:xfrm>
-            <a:off x="1325880" y="3721608"/>
-            <a:ext cx="2606040" cy="548640"/>
+            <a:off x="1307592" y="3511296"/>
+            <a:ext cx="2624328" cy="566928"/>
           </a:xfrm>
           <a:prstGeom prst="rect">
             <a:avLst/>
@@ -7579,7 +7579,7 @@
               </a:spcAft>
             </a:pPr>
             <a:r>
-              <a:rPr sz="1400" b="0">
+              <a:rPr sz="1350" b="0">
                 <a:solidFill>
                   <a:srgbClr val="2D3A2E"/>
                 </a:solidFill>
@@ -7598,8 +7598,8 @@
         </p:nvSpPr>
         <p:spPr>
           <a:xfrm>
-            <a:off x="960120" y="4361688"/>
-            <a:ext cx="219456" cy="219456"/>
+            <a:off x="960120" y="4096511"/>
+            <a:ext cx="201168" cy="201168"/>
           </a:xfrm>
           <a:prstGeom prst="ellipse">
             <a:avLst/>
@@ -7651,8 +7651,8 @@
         </p:nvSpPr>
         <p:spPr>
           <a:xfrm>
-            <a:off x="1325880" y="4306824"/>
-            <a:ext cx="2606040" cy="548640"/>
+            <a:off x="1307592" y="4023360"/>
+            <a:ext cx="2624328" cy="566928"/>
           </a:xfrm>
           <a:prstGeom prst="rect">
             <a:avLst/>
@@ -7674,7 +7674,7 @@
               </a:spcAft>
             </a:pPr>
             <a:r>
-              <a:rPr sz="1400" b="0">
+              <a:rPr sz="1350" b="0">
                 <a:solidFill>
                   <a:srgbClr val="2D3A2E"/>
                 </a:solidFill>
@@ -7693,8 +7693,8 @@
         </p:nvSpPr>
         <p:spPr>
           <a:xfrm>
-            <a:off x="960120" y="4946903"/>
-            <a:ext cx="219456" cy="219456"/>
+            <a:off x="960120" y="4608576"/>
+            <a:ext cx="201168" cy="201168"/>
           </a:xfrm>
           <a:prstGeom prst="ellipse">
             <a:avLst/>
@@ -7746,8 +7746,8 @@
         </p:nvSpPr>
         <p:spPr>
           <a:xfrm>
-            <a:off x="1325880" y="4892040"/>
-            <a:ext cx="2606040" cy="548640"/>
+            <a:off x="1307592" y="4535424"/>
+            <a:ext cx="2624328" cy="566928"/>
           </a:xfrm>
           <a:prstGeom prst="rect">
             <a:avLst/>
@@ -7769,7 +7769,7 @@
               </a:spcAft>
             </a:pPr>
             <a:r>
-              <a:rPr sz="1400" b="0">
+              <a:rPr sz="1350" b="0">
                 <a:solidFill>
                   <a:srgbClr val="2D3A2E"/>
                 </a:solidFill>
@@ -7788,8 +7788,8 @@
         </p:nvSpPr>
         <p:spPr>
           <a:xfrm>
-            <a:off x="960120" y="5532119"/>
-            <a:ext cx="219456" cy="219456"/>
+            <a:off x="960120" y="5120640"/>
+            <a:ext cx="201168" cy="201168"/>
           </a:xfrm>
           <a:prstGeom prst="ellipse">
             <a:avLst/>
@@ -7841,8 +7841,8 @@
         </p:nvSpPr>
         <p:spPr>
           <a:xfrm>
-            <a:off x="1325880" y="5477255"/>
-            <a:ext cx="2606040" cy="548640"/>
+            <a:off x="1307592" y="5047488"/>
+            <a:ext cx="2624328" cy="566928"/>
           </a:xfrm>
           <a:prstGeom prst="rect">
             <a:avLst/>
@@ -7864,20 +7864,115 @@
               </a:spcAft>
             </a:pPr>
             <a:r>
-              <a:rPr sz="1400" b="0">
+              <a:rPr sz="1350" b="0">
                 <a:solidFill>
                   <a:srgbClr val="2D3A2E"/>
                 </a:solidFill>
                 <a:latin typeface="Calibri"/>
               </a:rPr>
-              <a:t>Voir les passages du jour</a:t>
-            </a:r>
-          </a:p>
-        </p:txBody>
-      </p:sp>
-      <p:sp>
-        <p:nvSpPr>
-          <p:cNvPr id="18" name="Rounded Rectangle 17"/>
+              <a:t>Voir les paiements, réimprimer un reçu</a:t>
+            </a:r>
+          </a:p>
+        </p:txBody>
+      </p:sp>
+      <p:sp>
+        <p:nvSpPr>
+          <p:cNvPr id="18" name="Oval 17"/>
+          <p:cNvSpPr/>
+          <p:nvPr/>
+        </p:nvSpPr>
+        <p:spPr>
+          <a:xfrm>
+            <a:off x="960120" y="5632704"/>
+            <a:ext cx="201168" cy="201168"/>
+          </a:xfrm>
+          <a:prstGeom prst="ellipse">
+            <a:avLst/>
+          </a:prstGeom>
+          <a:solidFill>
+            <a:srgbClr val="4CAF50"/>
+          </a:solidFill>
+          <a:ln>
+            <a:noFill/>
+          </a:ln>
+          <a:effectLst/>
+        </p:spPr>
+        <p:style>
+          <a:lnRef idx="1">
+            <a:schemeClr val="accent1"/>
+          </a:lnRef>
+          <a:fillRef idx="3">
+            <a:schemeClr val="accent1"/>
+          </a:fillRef>
+          <a:effectRef idx="2">
+            <a:schemeClr val="accent1"/>
+          </a:effectRef>
+          <a:fontRef idx="minor">
+            <a:schemeClr val="lt1"/>
+          </a:fontRef>
+        </p:style>
+        <p:txBody>
+          <a:bodyPr rtlCol="0" anchor="ctr" lIns="0" rIns="0" tIns="0" bIns="0"/>
+          <a:lstStyle/>
+          <a:p>
+            <a:pPr algn="ctr"/>
+            <a:r>
+              <a:rPr sz="900" b="1">
+                <a:solidFill>
+                  <a:srgbClr val="FFFFFF"/>
+                </a:solidFill>
+                <a:latin typeface="Calibri"/>
+              </a:rPr>
+              <a:t/>
+            </a:r>
+          </a:p>
+        </p:txBody>
+      </p:sp>
+      <p:sp>
+        <p:nvSpPr>
+          <p:cNvPr id="19" name="TextBox 18"/>
+          <p:cNvSpPr txBox="1"/>
+          <p:nvPr/>
+        </p:nvSpPr>
+        <p:spPr>
+          <a:xfrm>
+            <a:off x="1307592" y="5559552"/>
+            <a:ext cx="2624328" cy="566928"/>
+          </a:xfrm>
+          <a:prstGeom prst="rect">
+            <a:avLst/>
+          </a:prstGeom>
+          <a:noFill/>
+        </p:spPr>
+        <p:txBody>
+          <a:bodyPr wrap="square" lIns="0" rIns="0" tIns="0" bIns="0" anchor="t">
+            <a:spAutoFit/>
+          </a:bodyPr>
+          <a:lstStyle/>
+          <a:p>
+            <a:pPr algn="l">
+              <a:lnSpc>
+                <a:spcPct val="115000"/>
+              </a:lnSpc>
+              <a:spcAft>
+                <a:spcPts val="600"/>
+              </a:spcAft>
+            </a:pPr>
+            <a:r>
+              <a:rPr sz="1350" b="0">
+                <a:solidFill>
+                  <a:srgbClr val="2D3A2E"/>
+                </a:solidFill>
+                <a:latin typeface="Calibri"/>
+              </a:rPr>
+              <a:t>Envoyer les relances WhatsApp</a:t>
+            </a:r>
+          </a:p>
+        </p:txBody>
+      </p:sp>
+      <p:sp>
+        <p:nvSpPr>
+          <p:cNvPr id="20" name="Rounded Rectangle 19"/>
           <p:cNvSpPr/>
           <p:nvPr/>
         </p:nvSpPr>
@@ -7925,7 +8020,7 @@
       </p:sp>
       <p:sp>
         <p:nvSpPr>
-          <p:cNvPr id="19" name="Rounded Rectangle 18"/>
+          <p:cNvPr id="21" name="Rounded Rectangle 20"/>
           <p:cNvSpPr/>
           <p:nvPr/>
         </p:nvSpPr>
@@ -7971,7 +8066,7 @@
       </p:sp>
       <p:sp>
         <p:nvSpPr>
-          <p:cNvPr id="20" name="TextBox 19"/>
+          <p:cNvPr id="22" name="TextBox 21"/>
           <p:cNvSpPr txBox="1"/>
           <p:nvPr/>
         </p:nvSpPr>
@@ -8010,14 +8105,14 @@
       </p:sp>
       <p:sp>
         <p:nvSpPr>
-          <p:cNvPr id="21" name="Oval 20"/>
+          <p:cNvPr id="23" name="Oval 22"/>
           <p:cNvSpPr/>
           <p:nvPr/>
         </p:nvSpPr>
         <p:spPr>
           <a:xfrm>
-            <a:off x="4617720" y="3191256"/>
-            <a:ext cx="219456" cy="219456"/>
+            <a:off x="4617720" y="3072384"/>
+            <a:ext cx="201168" cy="201168"/>
           </a:xfrm>
           <a:prstGeom prst="ellipse">
             <a:avLst/>
@@ -8063,14 +8158,14 @@
       </p:sp>
       <p:sp>
         <p:nvSpPr>
-          <p:cNvPr id="22" name="TextBox 21"/>
+          <p:cNvPr id="24" name="TextBox 23"/>
           <p:cNvSpPr txBox="1"/>
           <p:nvPr/>
         </p:nvSpPr>
         <p:spPr>
           <a:xfrm>
-            <a:off x="4983480" y="3136392"/>
-            <a:ext cx="2606040" cy="548640"/>
+            <a:off x="4965192" y="2999232"/>
+            <a:ext cx="2624328" cy="566928"/>
           </a:xfrm>
           <a:prstGeom prst="rect">
             <a:avLst/>
@@ -8092,7 +8187,7 @@
               </a:spcAft>
             </a:pPr>
             <a:r>
-              <a:rPr sz="1400" b="0">
+              <a:rPr sz="1350" b="0">
                 <a:solidFill>
                   <a:srgbClr val="2D3A2E"/>
                 </a:solidFill>
@@ -8105,14 +8200,14 @@
       </p:sp>
       <p:sp>
         <p:nvSpPr>
-          <p:cNvPr id="23" name="Oval 22"/>
+          <p:cNvPr id="25" name="Oval 24"/>
           <p:cNvSpPr/>
           <p:nvPr/>
         </p:nvSpPr>
         <p:spPr>
           <a:xfrm>
-            <a:off x="4617720" y="3776472"/>
-            <a:ext cx="219456" cy="219456"/>
+            <a:off x="4617720" y="3584448"/>
+            <a:ext cx="201168" cy="201168"/>
           </a:xfrm>
           <a:prstGeom prst="ellipse">
             <a:avLst/>
@@ -8158,14 +8253,14 @@
       </p:sp>
       <p:sp>
         <p:nvSpPr>
-          <p:cNvPr id="24" name="TextBox 23"/>
+          <p:cNvPr id="26" name="TextBox 25"/>
           <p:cNvSpPr txBox="1"/>
           <p:nvPr/>
         </p:nvSpPr>
         <p:spPr>
           <a:xfrm>
-            <a:off x="4983480" y="3721608"/>
-            <a:ext cx="2606040" cy="548640"/>
+            <a:off x="4965192" y="3511296"/>
+            <a:ext cx="2624328" cy="566928"/>
           </a:xfrm>
           <a:prstGeom prst="rect">
             <a:avLst/>
@@ -8187,27 +8282,27 @@
               </a:spcAft>
             </a:pPr>
             <a:r>
-              <a:rPr sz="1400" b="0">
+              <a:rPr sz="1350" b="0">
                 <a:solidFill>
                   <a:srgbClr val="2D3A2E"/>
                 </a:solidFill>
                 <a:latin typeface="Calibri"/>
               </a:rPr>
-              <a:t>Voir les paiements</a:t>
-            </a:r>
-          </a:p>
-        </p:txBody>
-      </p:sp>
-      <p:sp>
-        <p:nvSpPr>
-          <p:cNvPr id="25" name="Oval 24"/>
+              <a:t>Voir le tableau de bord</a:t>
+            </a:r>
+          </a:p>
+        </p:txBody>
+      </p:sp>
+      <p:sp>
+        <p:nvSpPr>
+          <p:cNvPr id="27" name="Oval 26"/>
           <p:cNvSpPr/>
           <p:nvPr/>
         </p:nvSpPr>
         <p:spPr>
           <a:xfrm>
-            <a:off x="4617720" y="4361688"/>
-            <a:ext cx="219456" cy="219456"/>
+            <a:off x="4617720" y="4096511"/>
+            <a:ext cx="201168" cy="201168"/>
           </a:xfrm>
           <a:prstGeom prst="ellipse">
             <a:avLst/>
@@ -8253,14 +8348,14 @@
       </p:sp>
       <p:sp>
         <p:nvSpPr>
-          <p:cNvPr id="26" name="TextBox 25"/>
+          <p:cNvPr id="28" name="TextBox 27"/>
           <p:cNvSpPr txBox="1"/>
           <p:nvPr/>
         </p:nvSpPr>
         <p:spPr>
           <a:xfrm>
-            <a:off x="4983480" y="4306824"/>
-            <a:ext cx="2606040" cy="548640"/>
+            <a:off x="4965192" y="4023360"/>
+            <a:ext cx="2624328" cy="566928"/>
           </a:xfrm>
           <a:prstGeom prst="rect">
             <a:avLst/>
@@ -8282,27 +8377,27 @@
               </a:spcAft>
             </a:pPr>
             <a:r>
-              <a:rPr sz="1400" b="0">
+              <a:rPr sz="1350" b="0">
                 <a:solidFill>
                   <a:srgbClr val="2D3A2E"/>
                 </a:solidFill>
                 <a:latin typeface="Calibri"/>
               </a:rPr>
-              <a:t>Voir le tableau de bord</a:t>
-            </a:r>
-          </a:p>
-        </p:txBody>
-      </p:sp>
-      <p:sp>
-        <p:nvSpPr>
-          <p:cNvPr id="27" name="Oval 26"/>
+              <a:t>Voir les revenus et statistiques</a:t>
+            </a:r>
+          </a:p>
+        </p:txBody>
+      </p:sp>
+      <p:sp>
+        <p:nvSpPr>
+          <p:cNvPr id="29" name="Oval 28"/>
           <p:cNvSpPr/>
           <p:nvPr/>
         </p:nvSpPr>
         <p:spPr>
           <a:xfrm>
-            <a:off x="4617720" y="4946903"/>
-            <a:ext cx="219456" cy="219456"/>
+            <a:off x="4617720" y="4608576"/>
+            <a:ext cx="201168" cy="201168"/>
           </a:xfrm>
           <a:prstGeom prst="ellipse">
             <a:avLst/>
@@ -8348,14 +8443,14 @@
       </p:sp>
       <p:sp>
         <p:nvSpPr>
-          <p:cNvPr id="28" name="TextBox 27"/>
+          <p:cNvPr id="30" name="TextBox 29"/>
           <p:cNvSpPr txBox="1"/>
           <p:nvPr/>
         </p:nvSpPr>
         <p:spPr>
           <a:xfrm>
-            <a:off x="4983480" y="4892040"/>
-            <a:ext cx="2606040" cy="548640"/>
+            <a:off x="4965192" y="4535424"/>
+            <a:ext cx="2624328" cy="566928"/>
           </a:xfrm>
           <a:prstGeom prst="rect">
             <a:avLst/>
@@ -8377,102 +8472,7 @@
               </a:spcAft>
             </a:pPr>
             <a:r>
-              <a:rPr sz="1400" b="0">
-                <a:solidFill>
-                  <a:srgbClr val="2D3A2E"/>
-                </a:solidFill>
-                <a:latin typeface="Calibri"/>
-              </a:rPr>
-              <a:t>Envoyer les relances WhatsApp</a:t>
-            </a:r>
-          </a:p>
-        </p:txBody>
-      </p:sp>
-      <p:sp>
-        <p:nvSpPr>
-          <p:cNvPr id="29" name="Oval 28"/>
-          <p:cNvSpPr/>
-          <p:nvPr/>
-        </p:nvSpPr>
-        <p:spPr>
-          <a:xfrm>
-            <a:off x="4617720" y="5532119"/>
-            <a:ext cx="219456" cy="219456"/>
-          </a:xfrm>
-          <a:prstGeom prst="ellipse">
-            <a:avLst/>
-          </a:prstGeom>
-          <a:solidFill>
-            <a:srgbClr val="F5C518"/>
-          </a:solidFill>
-          <a:ln>
-            <a:noFill/>
-          </a:ln>
-          <a:effectLst/>
-        </p:spPr>
-        <p:style>
-          <a:lnRef idx="1">
-            <a:schemeClr val="accent1"/>
-          </a:lnRef>
-          <a:fillRef idx="3">
-            <a:schemeClr val="accent1"/>
-          </a:fillRef>
-          <a:effectRef idx="2">
-            <a:schemeClr val="accent1"/>
-          </a:effectRef>
-          <a:fontRef idx="minor">
-            <a:schemeClr val="lt1"/>
-          </a:fontRef>
-        </p:style>
-        <p:txBody>
-          <a:bodyPr rtlCol="0" anchor="ctr" lIns="0" rIns="0" tIns="0" bIns="0"/>
-          <a:lstStyle/>
-          <a:p>
-            <a:pPr algn="ctr"/>
-            <a:r>
-              <a:rPr sz="900" b="1">
-                <a:solidFill>
-                  <a:srgbClr val="FFFFFF"/>
-                </a:solidFill>
-                <a:latin typeface="Calibri"/>
-              </a:rPr>
-              <a:t/>
-            </a:r>
-          </a:p>
-        </p:txBody>
-      </p:sp>
-      <p:sp>
-        <p:nvSpPr>
-          <p:cNvPr id="30" name="TextBox 29"/>
-          <p:cNvSpPr txBox="1"/>
-          <p:nvPr/>
-        </p:nvSpPr>
-        <p:spPr>
-          <a:xfrm>
-            <a:off x="4983480" y="5477255"/>
-            <a:ext cx="2606040" cy="548640"/>
-          </a:xfrm>
-          <a:prstGeom prst="rect">
-            <a:avLst/>
-          </a:prstGeom>
-          <a:noFill/>
-        </p:spPr>
-        <p:txBody>
-          <a:bodyPr wrap="square" lIns="0" rIns="0" tIns="0" bIns="0" anchor="t">
-            <a:spAutoFit/>
-          </a:bodyPr>
-          <a:lstStyle/>
-          <a:p>
-            <a:pPr algn="l">
-              <a:lnSpc>
-                <a:spcPct val="115000"/>
-              </a:lnSpc>
-              <a:spcAft>
-                <a:spcPts val="600"/>
-              </a:spcAft>
-            </a:pPr>
-            <a:r>
-              <a:rPr sz="1400" b="0">
+              <a:rPr sz="1350" b="0">
                 <a:solidFill>
                   <a:srgbClr val="2D3A2E"/>
                 </a:solidFill>
@@ -8624,8 +8624,8 @@
         </p:nvSpPr>
         <p:spPr>
           <a:xfrm>
-            <a:off x="8275320" y="3191256"/>
-            <a:ext cx="219456" cy="219456"/>
+            <a:off x="8275320" y="3072384"/>
+            <a:ext cx="201168" cy="201168"/>
           </a:xfrm>
           <a:prstGeom prst="ellipse">
             <a:avLst/>
@@ -8677,8 +8677,8 @@
         </p:nvSpPr>
         <p:spPr>
           <a:xfrm>
-            <a:off x="8641080" y="3136392"/>
-            <a:ext cx="2606040" cy="548640"/>
+            <a:off x="8622792" y="2999232"/>
+            <a:ext cx="2624328" cy="566928"/>
           </a:xfrm>
           <a:prstGeom prst="rect">
             <a:avLst/>
@@ -8700,7 +8700,7 @@
               </a:spcAft>
             </a:pPr>
             <a:r>
-              <a:rPr sz="1400" b="0">
+              <a:rPr sz="1350" b="0">
                 <a:solidFill>
                   <a:srgbClr val="2D3A2E"/>
                 </a:solidFill>
@@ -8719,8 +8719,8 @@
         </p:nvSpPr>
         <p:spPr>
           <a:xfrm>
-            <a:off x="8275320" y="3776472"/>
-            <a:ext cx="219456" cy="219456"/>
+            <a:off x="8275320" y="3584448"/>
+            <a:ext cx="201168" cy="201168"/>
           </a:xfrm>
           <a:prstGeom prst="ellipse">
             <a:avLst/>
@@ -8772,8 +8772,8 @@
         </p:nvSpPr>
         <p:spPr>
           <a:xfrm>
-            <a:off x="8641080" y="3721608"/>
-            <a:ext cx="2606040" cy="548640"/>
+            <a:off x="8622792" y="3511296"/>
+            <a:ext cx="2624328" cy="566928"/>
           </a:xfrm>
           <a:prstGeom prst="rect">
             <a:avLst/>
@@ -8795,7 +8795,7 @@
               </a:spcAft>
             </a:pPr>
             <a:r>
-              <a:rPr sz="1400" b="0">
+              <a:rPr sz="1350" b="0">
                 <a:solidFill>
                   <a:srgbClr val="2D3A2E"/>
                 </a:solidFill>
@@ -8814,8 +8814,8 @@
         </p:nvSpPr>
         <p:spPr>
           <a:xfrm>
-            <a:off x="8275320" y="4361688"/>
-            <a:ext cx="219456" cy="219456"/>
+            <a:off x="8275320" y="4096511"/>
+            <a:ext cx="201168" cy="201168"/>
           </a:xfrm>
           <a:prstGeom prst="ellipse">
             <a:avLst/>
@@ -8867,8 +8867,8 @@
         </p:nvSpPr>
         <p:spPr>
           <a:xfrm>
-            <a:off x="8641080" y="4306824"/>
-            <a:ext cx="2606040" cy="548640"/>
+            <a:off x="8622792" y="4023360"/>
+            <a:ext cx="2624328" cy="566928"/>
           </a:xfrm>
           <a:prstGeom prst="rect">
             <a:avLst/>
@@ -8890,7 +8890,7 @@
               </a:spcAft>
             </a:pPr>
             <a:r>
-              <a:rPr sz="1400" b="0">
+              <a:rPr sz="1350" b="0">
                 <a:solidFill>
                   <a:srgbClr val="2D3A2E"/>
                 </a:solidFill>
@@ -8909,8 +8909,8 @@
         </p:nvSpPr>
         <p:spPr>
           <a:xfrm>
-            <a:off x="8275320" y="4946903"/>
-            <a:ext cx="219456" cy="219456"/>
+            <a:off x="8275320" y="4608576"/>
+            <a:ext cx="201168" cy="201168"/>
           </a:xfrm>
           <a:prstGeom prst="ellipse">
             <a:avLst/>
@@ -8962,8 +8962,8 @@
         </p:nvSpPr>
         <p:spPr>
           <a:xfrm>
-            <a:off x="8641080" y="4892040"/>
-            <a:ext cx="2606040" cy="548640"/>
+            <a:off x="8622792" y="4535424"/>
+            <a:ext cx="2624328" cy="566928"/>
           </a:xfrm>
           <a:prstGeom prst="rect">
             <a:avLst/>
@@ -8985,7 +8985,7 @@
               </a:spcAft>
             </a:pPr>
             <a:r>
-              <a:rPr sz="1400" b="0">
+              <a:rPr sz="1350" b="0">
                 <a:solidFill>
                   <a:srgbClr val="2D3A2E"/>
                 </a:solidFill>
@@ -9004,8 +9004,8 @@
         </p:nvSpPr>
         <p:spPr>
           <a:xfrm>
-            <a:off x="8275320" y="5532119"/>
-            <a:ext cx="219456" cy="219456"/>
+            <a:off x="8275320" y="5120640"/>
+            <a:ext cx="201168" cy="201168"/>
           </a:xfrm>
           <a:prstGeom prst="ellipse">
             <a:avLst/>
@@ -9057,8 +9057,8 @@
         </p:nvSpPr>
         <p:spPr>
           <a:xfrm>
-            <a:off x="8641080" y="5477255"/>
-            <a:ext cx="2606040" cy="548640"/>
+            <a:off x="8622792" y="5047488"/>
+            <a:ext cx="2624328" cy="566928"/>
           </a:xfrm>
           <a:prstGeom prst="rect">
             <a:avLst/>
@@ -9080,7 +9080,102 @@
               </a:spcAft>
             </a:pPr>
             <a:r>
-              <a:rPr sz="1400" b="0">
+              <a:rPr sz="1350" b="0">
+                <a:solidFill>
+                  <a:srgbClr val="2D3A2E"/>
+                </a:solidFill>
+                <a:latin typeface="Calibri"/>
+              </a:rPr>
+              <a:t>Exports Excel et sauvegardes</a:t>
+            </a:r>
+          </a:p>
+        </p:txBody>
+      </p:sp>
+      <p:sp>
+        <p:nvSpPr>
+          <p:cNvPr id="44" name="Oval 43"/>
+          <p:cNvSpPr/>
+          <p:nvPr/>
+        </p:nvSpPr>
+        <p:spPr>
+          <a:xfrm>
+            <a:off x="8275320" y="5632704"/>
+            <a:ext cx="201168" cy="201168"/>
+          </a:xfrm>
+          <a:prstGeom prst="ellipse">
+            <a:avLst/>
+          </a:prstGeom>
+          <a:solidFill>
+            <a:srgbClr val="7B2FBE"/>
+          </a:solidFill>
+          <a:ln>
+            <a:noFill/>
+          </a:ln>
+          <a:effectLst/>
+        </p:spPr>
+        <p:style>
+          <a:lnRef idx="1">
+            <a:schemeClr val="accent1"/>
+          </a:lnRef>
+          <a:fillRef idx="3">
+            <a:schemeClr val="accent1"/>
+          </a:fillRef>
+          <a:effectRef idx="2">
+            <a:schemeClr val="accent1"/>
+          </a:effectRef>
+          <a:fontRef idx="minor">
+            <a:schemeClr val="lt1"/>
+          </a:fontRef>
+        </p:style>
+        <p:txBody>
+          <a:bodyPr rtlCol="0" anchor="ctr" lIns="0" rIns="0" tIns="0" bIns="0"/>
+          <a:lstStyle/>
+          <a:p>
+            <a:pPr algn="ctr"/>
+            <a:r>
+              <a:rPr sz="900" b="1">
+                <a:solidFill>
+                  <a:srgbClr val="FFFFFF"/>
+                </a:solidFill>
+                <a:latin typeface="Calibri"/>
+              </a:rPr>
+              <a:t/>
+            </a:r>
+          </a:p>
+        </p:txBody>
+      </p:sp>
+      <p:sp>
+        <p:nvSpPr>
+          <p:cNvPr id="45" name="TextBox 44"/>
+          <p:cNvSpPr txBox="1"/>
+          <p:nvPr/>
+        </p:nvSpPr>
+        <p:spPr>
+          <a:xfrm>
+            <a:off x="8622792" y="5559552"/>
+            <a:ext cx="2624328" cy="566928"/>
+          </a:xfrm>
+          <a:prstGeom prst="rect">
+            <a:avLst/>
+          </a:prstGeom>
+          <a:noFill/>
+        </p:spPr>
+        <p:txBody>
+          <a:bodyPr wrap="square" lIns="0" rIns="0" tIns="0" bIns="0" anchor="t">
+            <a:spAutoFit/>
+          </a:bodyPr>
+          <a:lstStyle/>
+          <a:p>
+            <a:pPr algn="l">
+              <a:lnSpc>
+                <a:spcPct val="115000"/>
+              </a:lnSpc>
+              <a:spcAft>
+                <a:spcPts val="600"/>
+              </a:spcAft>
+            </a:pPr>
+            <a:r>
+              <a:rPr sz="1350" b="0">
                 <a:solidFill>
                   <a:srgbClr val="2D3A2E"/>
                 </a:solidFill>

--- a/formation/Didikids_Parc_Formation_Employes.pptx
+++ b/formation/Didikids_Parc_Formation_Employes.pptx
@@ -7775,7 +7775,7 @@
                 </a:solidFill>
                 <a:latin typeface="Calibri"/>
               </a:rPr>
-              <a:t>Vendre au prix du catalogue</a:t>
+              <a:t>Encaisser au prix du catalogue</a:t>
             </a:r>
           </a:p>
         </p:txBody>
@@ -7870,7 +7870,7 @@
                 </a:solidFill>
                 <a:latin typeface="Calibri"/>
               </a:rPr>
-              <a:t>Voir les paiements, réimprimer un reçu</a:t>
+              <a:t>Imprimer le reçu de sa vente</a:t>
             </a:r>
           </a:p>
         </p:txBody>
@@ -8288,7 +8288,7 @@
                 </a:solidFill>
                 <a:latin typeface="Calibri"/>
               </a:rPr>
-              <a:t>Voir le tableau de bord</a:t>
+              <a:t>Voir les paiements du parc</a:t>
             </a:r>
           </a:p>
         </p:txBody>
